--- a/slides/Paiths-Class.pptx
+++ b/slides/Paiths-Class.pptx
@@ -3487,7 +3487,13 @@
           <p:nvPr/>
         </p:nvPicPr>
         <p:blipFill>
-          <a:blip r:embed="rId3"/>
+          <a:blip r:embed="rId3" cstate="print">
+            <a:extLst>
+              <a:ext uri="{28A0092B-C50C-407E-A947-70E740481C1C}">
+                <a14:useLocalDpi xmlns:a14="http://schemas.microsoft.com/office/drawing/2010/main"/>
+              </a:ext>
+            </a:extLst>
+          </a:blip>
           <a:stretch>
             <a:fillRect/>
           </a:stretch>
@@ -3522,7 +3528,13 @@
           <p:nvPr/>
         </p:nvPicPr>
         <p:blipFill>
-          <a:blip r:embed="rId4"/>
+          <a:blip r:embed="rId4" cstate="print">
+            <a:extLst>
+              <a:ext uri="{28A0092B-C50C-407E-A947-70E740481C1C}">
+                <a14:useLocalDpi xmlns:a14="http://schemas.microsoft.com/office/drawing/2010/main"/>
+              </a:ext>
+            </a:extLst>
+          </a:blip>
           <a:stretch>
             <a:fillRect/>
           </a:stretch>
@@ -3605,7 +3617,13 @@
               <p:nvPr/>
             </p:nvPicPr>
             <p:blipFill>
-              <a:blip r:embed="rId5" cstate="print"/>
+              <a:blip r:embed="rId5" cstate="print">
+                <a:extLst>
+                  <a:ext uri="{28A0092B-C50C-407E-A947-70E740481C1C}">
+                    <a14:useLocalDpi xmlns:a14="http://schemas.microsoft.com/office/drawing/2010/main"/>
+                  </a:ext>
+                </a:extLst>
+              </a:blip>
               <a:srcRect/>
               <a:stretch>
                 <a:fillRect/>
@@ -4380,7 +4398,13 @@
           <p:nvPr/>
         </p:nvPicPr>
         <p:blipFill>
-          <a:blip r:embed="rId7"/>
+          <a:blip r:embed="rId7" cstate="print">
+            <a:extLst>
+              <a:ext uri="{28A0092B-C50C-407E-A947-70E740481C1C}">
+                <a14:useLocalDpi xmlns:a14="http://schemas.microsoft.com/office/drawing/2010/main"/>
+              </a:ext>
+            </a:extLst>
+          </a:blip>
           <a:stretch>
             <a:fillRect/>
           </a:stretch>
@@ -4410,7 +4434,13 @@
           <p:nvPr/>
         </p:nvPicPr>
         <p:blipFill>
-          <a:blip r:embed="rId8"/>
+          <a:blip r:embed="rId8" cstate="print">
+            <a:extLst>
+              <a:ext uri="{28A0092B-C50C-407E-A947-70E740481C1C}">
+                <a14:useLocalDpi xmlns:a14="http://schemas.microsoft.com/office/drawing/2010/main"/>
+              </a:ext>
+            </a:extLst>
+          </a:blip>
           <a:stretch>
             <a:fillRect/>
           </a:stretch>
@@ -4493,7 +4523,13 @@
           <p:nvPr/>
         </p:nvPicPr>
         <p:blipFill>
-          <a:blip r:embed="rId9"/>
+          <a:blip r:embed="rId9" cstate="print">
+            <a:extLst>
+              <a:ext uri="{28A0092B-C50C-407E-A947-70E740481C1C}">
+                <a14:useLocalDpi xmlns:a14="http://schemas.microsoft.com/office/drawing/2010/main"/>
+              </a:ext>
+            </a:extLst>
+          </a:blip>
           <a:stretch>
             <a:fillRect/>
           </a:stretch>
@@ -4636,7 +4672,13 @@
           <p:nvPr/>
         </p:nvPicPr>
         <p:blipFill>
-          <a:blip r:embed="rId10"/>
+          <a:blip r:embed="rId10" cstate="print">
+            <a:extLst>
+              <a:ext uri="{28A0092B-C50C-407E-A947-70E740481C1C}">
+                <a14:useLocalDpi xmlns:a14="http://schemas.microsoft.com/office/drawing/2010/main"/>
+              </a:ext>
+            </a:extLst>
+          </a:blip>
           <a:stretch>
             <a:fillRect/>
           </a:stretch>
